--- a/sorting_algorithms/Merge Sort.pptx
+++ b/sorting_algorithms/Merge Sort.pptx
@@ -5,7 +5,7 @@
     <p:sldMasterId id="2147483648" r:id="rId4"/>
   </p:sldMasterIdLst>
   <p:notesMasterIdLst>
-    <p:notesMasterId r:id="rId11"/>
+    <p:notesMasterId r:id="rId12"/>
   </p:notesMasterIdLst>
   <p:sldIdLst>
     <p:sldId id="272" r:id="rId5"/>
@@ -14,6 +14,7 @@
     <p:sldId id="278" r:id="rId8"/>
     <p:sldId id="279" r:id="rId9"/>
     <p:sldId id="280" r:id="rId10"/>
+    <p:sldId id="281" r:id="rId11"/>
   </p:sldIdLst>
   <p:sldSz cx="12192000" cy="6858000"/>
   <p:notesSz cx="6858000" cy="9144000"/>
@@ -210,7 +211,7 @@
           <a:p>
             <a:fld id="{F666E1FD-E7A0-497B-BBC0-740BAAC97C64}" type="datetimeFigureOut">
               <a:rPr lang="en-PH" smtClean="0"/>
-              <a:t>06/07/2026</a:t>
+              <a:t>14/07/2026</a:t>
             </a:fld>
             <a:endParaRPr lang="en-PH"/>
           </a:p>
@@ -982,6 +983,114 @@
 </p:notes>
 </file>
 
+<file path=ppt/notesSlides/notesSlide7.xml><?xml version="1.0" encoding="utf-8"?>
+<p:notes xmlns:a="http://schemas.openxmlformats.org/drawingml/2006/main" xmlns:r="http://schemas.openxmlformats.org/officeDocument/2006/relationships" xmlns:p="http://schemas.openxmlformats.org/presentationml/2006/main">
+  <p:cSld>
+    <p:spTree>
+      <p:nvGrpSpPr>
+        <p:cNvPr id="1" name="">
+          <a:extLst>
+            <a:ext uri="{FF2B5EF4-FFF2-40B4-BE49-F238E27FC236}">
+              <a16:creationId xmlns:a16="http://schemas.microsoft.com/office/drawing/2014/main" id="{F76457D7-F06D-954A-F501-A4AE97460B30}"/>
+            </a:ext>
+          </a:extLst>
+        </p:cNvPr>
+        <p:cNvGrpSpPr/>
+        <p:nvPr/>
+      </p:nvGrpSpPr>
+      <p:grpSpPr>
+        <a:xfrm>
+          <a:off x="0" y="0"/>
+          <a:ext cx="0" cy="0"/>
+          <a:chOff x="0" y="0"/>
+          <a:chExt cx="0" cy="0"/>
+        </a:xfrm>
+      </p:grpSpPr>
+      <p:sp>
+        <p:nvSpPr>
+          <p:cNvPr id="2" name="Slide Image Placeholder 1">
+            <a:extLst>
+              <a:ext uri="{FF2B5EF4-FFF2-40B4-BE49-F238E27FC236}">
+                <a16:creationId xmlns:a16="http://schemas.microsoft.com/office/drawing/2014/main" id="{0DBAA7AF-F153-27C2-2BF0-F9DB6684B649}"/>
+              </a:ext>
+            </a:extLst>
+          </p:cNvPr>
+          <p:cNvSpPr>
+            <a:spLocks noGrp="1" noRot="1" noChangeAspect="1"/>
+          </p:cNvSpPr>
+          <p:nvPr>
+            <p:ph type="sldImg"/>
+          </p:nvPr>
+        </p:nvSpPr>
+        <p:spPr/>
+      </p:sp>
+      <p:sp>
+        <p:nvSpPr>
+          <p:cNvPr id="3" name="Notes Placeholder 2">
+            <a:extLst>
+              <a:ext uri="{FF2B5EF4-FFF2-40B4-BE49-F238E27FC236}">
+                <a16:creationId xmlns:a16="http://schemas.microsoft.com/office/drawing/2014/main" id="{0ABFB6E7-9431-72EC-2C48-C505190C223C}"/>
+              </a:ext>
+            </a:extLst>
+          </p:cNvPr>
+          <p:cNvSpPr>
+            <a:spLocks noGrp="1"/>
+          </p:cNvSpPr>
+          <p:nvPr>
+            <p:ph type="body" idx="1"/>
+          </p:nvPr>
+        </p:nvSpPr>
+        <p:spPr/>
+        <p:txBody>
+          <a:bodyPr/>
+          <a:lstStyle/>
+          <a:p>
+            <a:endParaRPr lang="en-PH" dirty="0"/>
+          </a:p>
+        </p:txBody>
+      </p:sp>
+      <p:sp>
+        <p:nvSpPr>
+          <p:cNvPr id="4" name="Slide Number Placeholder 3">
+            <a:extLst>
+              <a:ext uri="{FF2B5EF4-FFF2-40B4-BE49-F238E27FC236}">
+                <a16:creationId xmlns:a16="http://schemas.microsoft.com/office/drawing/2014/main" id="{9A8D14B9-C09A-B1E1-5CB8-E82A9217D738}"/>
+              </a:ext>
+            </a:extLst>
+          </p:cNvPr>
+          <p:cNvSpPr>
+            <a:spLocks noGrp="1"/>
+          </p:cNvSpPr>
+          <p:nvPr>
+            <p:ph type="sldNum" sz="quarter" idx="5"/>
+          </p:nvPr>
+        </p:nvSpPr>
+        <p:spPr/>
+        <p:txBody>
+          <a:bodyPr/>
+          <a:lstStyle/>
+          <a:p>
+            <a:fld id="{FE90CCE9-4AAE-4E1F-85AD-521A406D6524}" type="slidenum">
+              <a:rPr lang="en-PH" smtClean="0"/>
+              <a:t>7</a:t>
+            </a:fld>
+            <a:endParaRPr lang="en-PH"/>
+          </a:p>
+        </p:txBody>
+      </p:sp>
+    </p:spTree>
+    <p:extLst>
+      <p:ext uri="{BB962C8B-B14F-4D97-AF65-F5344CB8AC3E}">
+        <p14:creationId xmlns:p14="http://schemas.microsoft.com/office/powerpoint/2010/main" val="1594109192"/>
+      </p:ext>
+    </p:extLst>
+  </p:cSld>
+  <p:clrMapOvr>
+    <a:masterClrMapping/>
+  </p:clrMapOvr>
+</p:notes>
+</file>
+
 <file path=ppt/slideLayouts/slideLayout1.xml><?xml version="1.0" encoding="utf-8"?>
 <p:sldLayout xmlns:a="http://schemas.openxmlformats.org/drawingml/2006/main" xmlns:r="http://schemas.openxmlformats.org/officeDocument/2006/relationships" xmlns:p="http://schemas.openxmlformats.org/presentationml/2006/main" type="title" preserve="1">
   <p:cSld name="Title Slide">
@@ -1131,7 +1240,7 @@
           <a:p>
             <a:fld id="{0CCF0B81-6BD8-4C65-9459-815598C5F1F4}" type="datetimeFigureOut">
               <a:rPr lang="en-PH" smtClean="0"/>
-              <a:t>06/07/2026</a:t>
+              <a:t>14/07/2026</a:t>
             </a:fld>
             <a:endParaRPr lang="en-PH"/>
           </a:p>
@@ -1331,7 +1440,7 @@
           <a:p>
             <a:fld id="{0CCF0B81-6BD8-4C65-9459-815598C5F1F4}" type="datetimeFigureOut">
               <a:rPr lang="en-PH" smtClean="0"/>
-              <a:t>06/07/2026</a:t>
+              <a:t>14/07/2026</a:t>
             </a:fld>
             <a:endParaRPr lang="en-PH"/>
           </a:p>
@@ -1541,7 +1650,7 @@
           <a:p>
             <a:fld id="{0CCF0B81-6BD8-4C65-9459-815598C5F1F4}" type="datetimeFigureOut">
               <a:rPr lang="en-PH" smtClean="0"/>
-              <a:t>06/07/2026</a:t>
+              <a:t>14/07/2026</a:t>
             </a:fld>
             <a:endParaRPr lang="en-PH"/>
           </a:p>
@@ -1741,7 +1850,7 @@
           <a:p>
             <a:fld id="{0CCF0B81-6BD8-4C65-9459-815598C5F1F4}" type="datetimeFigureOut">
               <a:rPr lang="en-PH" smtClean="0"/>
-              <a:t>06/07/2026</a:t>
+              <a:t>14/07/2026</a:t>
             </a:fld>
             <a:endParaRPr lang="en-PH"/>
           </a:p>
@@ -2017,7 +2126,7 @@
           <a:p>
             <a:fld id="{0CCF0B81-6BD8-4C65-9459-815598C5F1F4}" type="datetimeFigureOut">
               <a:rPr lang="en-PH" smtClean="0"/>
-              <a:t>06/07/2026</a:t>
+              <a:t>14/07/2026</a:t>
             </a:fld>
             <a:endParaRPr lang="en-PH"/>
           </a:p>
@@ -2285,7 +2394,7 @@
           <a:p>
             <a:fld id="{0CCF0B81-6BD8-4C65-9459-815598C5F1F4}" type="datetimeFigureOut">
               <a:rPr lang="en-PH" smtClean="0"/>
-              <a:t>06/07/2026</a:t>
+              <a:t>14/07/2026</a:t>
             </a:fld>
             <a:endParaRPr lang="en-PH"/>
           </a:p>
@@ -2700,7 +2809,7 @@
           <a:p>
             <a:fld id="{0CCF0B81-6BD8-4C65-9459-815598C5F1F4}" type="datetimeFigureOut">
               <a:rPr lang="en-PH" smtClean="0"/>
-              <a:t>06/07/2026</a:t>
+              <a:t>14/07/2026</a:t>
             </a:fld>
             <a:endParaRPr lang="en-PH"/>
           </a:p>
@@ -2842,7 +2951,7 @@
           <a:p>
             <a:fld id="{0CCF0B81-6BD8-4C65-9459-815598C5F1F4}" type="datetimeFigureOut">
               <a:rPr lang="en-PH" smtClean="0"/>
-              <a:t>06/07/2026</a:t>
+              <a:t>14/07/2026</a:t>
             </a:fld>
             <a:endParaRPr lang="en-PH"/>
           </a:p>
@@ -2955,7 +3064,7 @@
           <a:p>
             <a:fld id="{0CCF0B81-6BD8-4C65-9459-815598C5F1F4}" type="datetimeFigureOut">
               <a:rPr lang="en-PH" smtClean="0"/>
-              <a:t>06/07/2026</a:t>
+              <a:t>14/07/2026</a:t>
             </a:fld>
             <a:endParaRPr lang="en-PH"/>
           </a:p>
@@ -3268,7 +3377,7 @@
           <a:p>
             <a:fld id="{0CCF0B81-6BD8-4C65-9459-815598C5F1F4}" type="datetimeFigureOut">
               <a:rPr lang="en-PH" smtClean="0"/>
-              <a:t>06/07/2026</a:t>
+              <a:t>14/07/2026</a:t>
             </a:fld>
             <a:endParaRPr lang="en-PH"/>
           </a:p>
@@ -3557,7 +3666,7 @@
           <a:p>
             <a:fld id="{0CCF0B81-6BD8-4C65-9459-815598C5F1F4}" type="datetimeFigureOut">
               <a:rPr lang="en-PH" smtClean="0"/>
-              <a:t>06/07/2026</a:t>
+              <a:t>14/07/2026</a:t>
             </a:fld>
             <a:endParaRPr lang="en-PH"/>
           </a:p>
@@ -3800,7 +3909,7 @@
           <a:p>
             <a:fld id="{0CCF0B81-6BD8-4C65-9459-815598C5F1F4}" type="datetimeFigureOut">
               <a:rPr lang="en-PH" smtClean="0"/>
-              <a:t>06/07/2026</a:t>
+              <a:t>14/07/2026</a:t>
             </a:fld>
             <a:endParaRPr lang="en-PH"/>
           </a:p>
@@ -10139,6 +10248,787 @@
       <p:bldP spid="19" grpId="0" animBg="1"/>
       <p:bldP spid="19" grpId="1" animBg="1"/>
       <p:bldP spid="5" grpId="0" animBg="1"/>
+    </p:bldLst>
+  </p:timing>
+</p:sld>
+</file>
+
+<file path=ppt/slides/slide7.xml><?xml version="1.0" encoding="utf-8"?>
+<p:sld xmlns:a="http://schemas.openxmlformats.org/drawingml/2006/main" xmlns:r="http://schemas.openxmlformats.org/officeDocument/2006/relationships" xmlns:p="http://schemas.openxmlformats.org/presentationml/2006/main">
+  <p:cSld>
+    <p:bg>
+      <p:bgPr>
+        <a:solidFill>
+          <a:schemeClr val="bg1"/>
+        </a:solidFill>
+        <a:effectLst/>
+      </p:bgPr>
+    </p:bg>
+    <p:spTree>
+      <p:nvGrpSpPr>
+        <p:cNvPr id="1" name="">
+          <a:extLst>
+            <a:ext uri="{FF2B5EF4-FFF2-40B4-BE49-F238E27FC236}">
+              <a16:creationId xmlns:a16="http://schemas.microsoft.com/office/drawing/2014/main" id="{481A3857-05C9-DF70-5082-F8F1F6CF2BCD}"/>
+            </a:ext>
+          </a:extLst>
+        </p:cNvPr>
+        <p:cNvGrpSpPr/>
+        <p:nvPr/>
+      </p:nvGrpSpPr>
+      <p:grpSpPr>
+        <a:xfrm>
+          <a:off x="0" y="0"/>
+          <a:ext cx="0" cy="0"/>
+          <a:chOff x="0" y="0"/>
+          <a:chExt cx="0" cy="0"/>
+        </a:xfrm>
+      </p:grpSpPr>
+      <p:cxnSp>
+        <p:nvCxnSpPr>
+          <p:cNvPr id="6" name="Straight Arrow Connector 5">
+            <a:extLst>
+              <a:ext uri="{FF2B5EF4-FFF2-40B4-BE49-F238E27FC236}">
+                <a16:creationId xmlns:a16="http://schemas.microsoft.com/office/drawing/2014/main" id="{3EF3D6FC-928F-8722-49BA-978FB9EF189A}"/>
+              </a:ext>
+            </a:extLst>
+          </p:cNvPr>
+          <p:cNvCxnSpPr/>
+          <p:nvPr/>
+        </p:nvCxnSpPr>
+        <p:spPr>
+          <a:xfrm>
+            <a:off x="1968500" y="5486400"/>
+            <a:ext cx="8020050" cy="0"/>
+          </a:xfrm>
+          <a:prstGeom prst="straightConnector1">
+            <a:avLst/>
+          </a:prstGeom>
+          <a:ln w="76200">
+            <a:solidFill>
+              <a:schemeClr val="bg2">
+                <a:lumMod val="90000"/>
+              </a:schemeClr>
+            </a:solidFill>
+            <a:tailEnd type="triangle"/>
+          </a:ln>
+        </p:spPr>
+        <p:style>
+          <a:lnRef idx="1">
+            <a:schemeClr val="accent1"/>
+          </a:lnRef>
+          <a:fillRef idx="0">
+            <a:schemeClr val="accent1"/>
+          </a:fillRef>
+          <a:effectRef idx="0">
+            <a:schemeClr val="accent1"/>
+          </a:effectRef>
+          <a:fontRef idx="minor">
+            <a:schemeClr val="tx1"/>
+          </a:fontRef>
+        </p:style>
+      </p:cxnSp>
+      <p:cxnSp>
+        <p:nvCxnSpPr>
+          <p:cNvPr id="7" name="Straight Arrow Connector 6">
+            <a:extLst>
+              <a:ext uri="{FF2B5EF4-FFF2-40B4-BE49-F238E27FC236}">
+                <a16:creationId xmlns:a16="http://schemas.microsoft.com/office/drawing/2014/main" id="{F92D7644-C02C-A6A1-5CAD-D640091628F5}"/>
+              </a:ext>
+            </a:extLst>
+          </p:cNvPr>
+          <p:cNvCxnSpPr>
+            <a:cxnSpLocks/>
+          </p:cNvCxnSpPr>
+          <p:nvPr/>
+        </p:nvCxnSpPr>
+        <p:spPr>
+          <a:xfrm flipV="1">
+            <a:off x="1968500" y="327025"/>
+            <a:ext cx="0" cy="5197475"/>
+          </a:xfrm>
+          <a:prstGeom prst="straightConnector1">
+            <a:avLst/>
+          </a:prstGeom>
+          <a:ln w="76200">
+            <a:solidFill>
+              <a:schemeClr val="bg2">
+                <a:lumMod val="90000"/>
+              </a:schemeClr>
+            </a:solidFill>
+            <a:tailEnd type="triangle"/>
+          </a:ln>
+        </p:spPr>
+        <p:style>
+          <a:lnRef idx="1">
+            <a:schemeClr val="accent1"/>
+          </a:lnRef>
+          <a:fillRef idx="0">
+            <a:schemeClr val="accent1"/>
+          </a:fillRef>
+          <a:effectRef idx="0">
+            <a:schemeClr val="accent1"/>
+          </a:effectRef>
+          <a:fontRef idx="minor">
+            <a:schemeClr val="tx1"/>
+          </a:fontRef>
+        </p:style>
+      </p:cxnSp>
+      <p:sp>
+        <p:nvSpPr>
+          <p:cNvPr id="8" name="TextBox 7">
+            <a:extLst>
+              <a:ext uri="{FF2B5EF4-FFF2-40B4-BE49-F238E27FC236}">
+                <a16:creationId xmlns:a16="http://schemas.microsoft.com/office/drawing/2014/main" id="{8054C5A5-CB79-B3FF-1404-53676939D1B0}"/>
+              </a:ext>
+            </a:extLst>
+          </p:cNvPr>
+          <p:cNvSpPr txBox="1"/>
+          <p:nvPr/>
+        </p:nvSpPr>
+        <p:spPr>
+          <a:xfrm>
+            <a:off x="5321935" y="5652964"/>
+            <a:ext cx="1313180" cy="707886"/>
+          </a:xfrm>
+          <a:prstGeom prst="rect">
+            <a:avLst/>
+          </a:prstGeom>
+          <a:noFill/>
+        </p:spPr>
+        <p:txBody>
+          <a:bodyPr wrap="none" rtlCol="0">
+            <a:spAutoFit/>
+          </a:bodyPr>
+          <a:lstStyle/>
+          <a:p>
+            <a:r>
+              <a:rPr lang="en-PH" sz="4000" b="1" dirty="0">
+                <a:latin typeface="Consolas" panose="020B0609020204030204" pitchFamily="49" charset="0"/>
+              </a:rPr>
+              <a:t>data</a:t>
+            </a:r>
+          </a:p>
+        </p:txBody>
+      </p:sp>
+      <p:sp>
+        <p:nvSpPr>
+          <p:cNvPr id="9" name="TextBox 8">
+            <a:extLst>
+              <a:ext uri="{FF2B5EF4-FFF2-40B4-BE49-F238E27FC236}">
+                <a16:creationId xmlns:a16="http://schemas.microsoft.com/office/drawing/2014/main" id="{432D9963-CCCF-AE66-4C6D-7D2F29610522}"/>
+              </a:ext>
+            </a:extLst>
+          </p:cNvPr>
+          <p:cNvSpPr txBox="1"/>
+          <p:nvPr/>
+        </p:nvSpPr>
+        <p:spPr>
+          <a:xfrm rot="5400000" flipH="1">
+            <a:off x="513467" y="2571819"/>
+            <a:ext cx="1313180" cy="707886"/>
+          </a:xfrm>
+          <a:prstGeom prst="rect">
+            <a:avLst/>
+          </a:prstGeom>
+          <a:noFill/>
+        </p:spPr>
+        <p:txBody>
+          <a:bodyPr wrap="none" rtlCol="0">
+            <a:spAutoFit/>
+          </a:bodyPr>
+          <a:lstStyle/>
+          <a:p>
+            <a:r>
+              <a:rPr lang="en-PH" sz="4000" b="1" dirty="0">
+                <a:latin typeface="Consolas" panose="020B0609020204030204" pitchFamily="49" charset="0"/>
+              </a:rPr>
+              <a:t>time</a:t>
+            </a:r>
+          </a:p>
+        </p:txBody>
+      </p:sp>
+      <p:cxnSp>
+        <p:nvCxnSpPr>
+          <p:cNvPr id="10" name="Straight Arrow Connector 9">
+            <a:extLst>
+              <a:ext uri="{FF2B5EF4-FFF2-40B4-BE49-F238E27FC236}">
+                <a16:creationId xmlns:a16="http://schemas.microsoft.com/office/drawing/2014/main" id="{899DF266-054C-26F3-67C0-87FB85CB232A}"/>
+              </a:ext>
+            </a:extLst>
+          </p:cNvPr>
+          <p:cNvCxnSpPr>
+            <a:cxnSpLocks/>
+          </p:cNvCxnSpPr>
+          <p:nvPr/>
+        </p:nvCxnSpPr>
+        <p:spPr>
+          <a:xfrm flipV="1">
+            <a:off x="1968500" y="2125981"/>
+            <a:ext cx="5925820" cy="3322320"/>
+          </a:xfrm>
+          <a:prstGeom prst="straightConnector1">
+            <a:avLst/>
+          </a:prstGeom>
+          <a:ln w="76200">
+            <a:solidFill>
+              <a:srgbClr val="FFFF00"/>
+            </a:solidFill>
+            <a:tailEnd type="none"/>
+          </a:ln>
+        </p:spPr>
+        <p:style>
+          <a:lnRef idx="1">
+            <a:schemeClr val="accent1"/>
+          </a:lnRef>
+          <a:fillRef idx="0">
+            <a:schemeClr val="accent1"/>
+          </a:fillRef>
+          <a:effectRef idx="0">
+            <a:schemeClr val="accent1"/>
+          </a:effectRef>
+          <a:fontRef idx="minor">
+            <a:schemeClr val="tx1"/>
+          </a:fontRef>
+        </p:style>
+      </p:cxnSp>
+      <p:sp>
+        <p:nvSpPr>
+          <p:cNvPr id="11" name="Arc 10">
+            <a:extLst>
+              <a:ext uri="{FF2B5EF4-FFF2-40B4-BE49-F238E27FC236}">
+                <a16:creationId xmlns:a16="http://schemas.microsoft.com/office/drawing/2014/main" id="{2032B1D6-6A53-888D-DE60-09BC031AFC9E}"/>
+              </a:ext>
+            </a:extLst>
+          </p:cNvPr>
+          <p:cNvSpPr/>
+          <p:nvPr/>
+        </p:nvSpPr>
+        <p:spPr>
+          <a:xfrm rot="16200000">
+            <a:off x="7532684" y="-1535115"/>
+            <a:ext cx="2933704" cy="13852525"/>
+          </a:xfrm>
+          <a:prstGeom prst="arc">
+            <a:avLst>
+              <a:gd name="adj1" fmla="val 16200000"/>
+              <a:gd name="adj2" fmla="val 228024"/>
+            </a:avLst>
+          </a:prstGeom>
+          <a:ln w="76200">
+            <a:solidFill>
+              <a:srgbClr val="92D050"/>
+            </a:solidFill>
+          </a:ln>
+        </p:spPr>
+        <p:style>
+          <a:lnRef idx="1">
+            <a:schemeClr val="accent1"/>
+          </a:lnRef>
+          <a:fillRef idx="0">
+            <a:schemeClr val="accent1"/>
+          </a:fillRef>
+          <a:effectRef idx="0">
+            <a:schemeClr val="accent1"/>
+          </a:effectRef>
+          <a:fontRef idx="minor">
+            <a:schemeClr val="tx1"/>
+          </a:fontRef>
+        </p:style>
+        <p:txBody>
+          <a:bodyPr rtlCol="0" anchor="ctr"/>
+          <a:lstStyle/>
+          <a:p>
+            <a:pPr algn="ctr"/>
+            <a:endParaRPr lang="en-PH"/>
+          </a:p>
+        </p:txBody>
+      </p:sp>
+      <p:sp>
+        <p:nvSpPr>
+          <p:cNvPr id="20" name="TextBox 19">
+            <a:extLst>
+              <a:ext uri="{FF2B5EF4-FFF2-40B4-BE49-F238E27FC236}">
+                <a16:creationId xmlns:a16="http://schemas.microsoft.com/office/drawing/2014/main" id="{4B6196A7-6A90-1770-B53F-6517D14BBDB2}"/>
+              </a:ext>
+            </a:extLst>
+          </p:cNvPr>
+          <p:cNvSpPr txBox="1"/>
+          <p:nvPr/>
+        </p:nvSpPr>
+        <p:spPr>
+          <a:xfrm>
+            <a:off x="8179435" y="1667966"/>
+            <a:ext cx="1313180" cy="707886"/>
+          </a:xfrm>
+          <a:prstGeom prst="rect">
+            <a:avLst/>
+          </a:prstGeom>
+          <a:noFill/>
+        </p:spPr>
+        <p:txBody>
+          <a:bodyPr wrap="none" rtlCol="0">
+            <a:spAutoFit/>
+          </a:bodyPr>
+          <a:lstStyle/>
+          <a:p>
+            <a:r>
+              <a:rPr lang="en-PH" sz="4000" b="1" dirty="0">
+                <a:solidFill>
+                  <a:srgbClr val="FFFF00"/>
+                </a:solidFill>
+                <a:latin typeface="Consolas" panose="020B0609020204030204" pitchFamily="49" charset="0"/>
+              </a:rPr>
+              <a:t>O(n)</a:t>
+            </a:r>
+          </a:p>
+        </p:txBody>
+      </p:sp>
+      <p:sp>
+        <p:nvSpPr>
+          <p:cNvPr id="21" name="TextBox 20">
+            <a:extLst>
+              <a:ext uri="{FF2B5EF4-FFF2-40B4-BE49-F238E27FC236}">
+                <a16:creationId xmlns:a16="http://schemas.microsoft.com/office/drawing/2014/main" id="{9B98DC71-193A-85DC-A6D1-F022E0F7A03E}"/>
+              </a:ext>
+            </a:extLst>
+          </p:cNvPr>
+          <p:cNvSpPr txBox="1"/>
+          <p:nvPr/>
+        </p:nvSpPr>
+        <p:spPr>
+          <a:xfrm>
+            <a:off x="9447153" y="3489146"/>
+            <a:ext cx="2441694" cy="707886"/>
+          </a:xfrm>
+          <a:prstGeom prst="rect">
+            <a:avLst/>
+          </a:prstGeom>
+          <a:noFill/>
+        </p:spPr>
+        <p:txBody>
+          <a:bodyPr wrap="none" rtlCol="0">
+            <a:spAutoFit/>
+          </a:bodyPr>
+          <a:lstStyle/>
+          <a:p>
+            <a:r>
+              <a:rPr lang="en-PH" sz="4000" b="1" dirty="0">
+                <a:solidFill>
+                  <a:srgbClr val="92D050"/>
+                </a:solidFill>
+                <a:latin typeface="Consolas" panose="020B0609020204030204" pitchFamily="49" charset="0"/>
+              </a:rPr>
+              <a:t>O(log n)</a:t>
+            </a:r>
+          </a:p>
+        </p:txBody>
+      </p:sp>
+      <p:sp>
+        <p:nvSpPr>
+          <p:cNvPr id="22" name="Freeform: Shape 21">
+            <a:extLst>
+              <a:ext uri="{FF2B5EF4-FFF2-40B4-BE49-F238E27FC236}">
+                <a16:creationId xmlns:a16="http://schemas.microsoft.com/office/drawing/2014/main" id="{F4581BAA-5C04-48A0-E56B-57EF522E34ED}"/>
+              </a:ext>
+            </a:extLst>
+          </p:cNvPr>
+          <p:cNvSpPr/>
+          <p:nvPr/>
+        </p:nvSpPr>
+        <p:spPr>
+          <a:xfrm>
+            <a:off x="2109019" y="730045"/>
+            <a:ext cx="4856961" cy="4675239"/>
+          </a:xfrm>
+          <a:custGeom>
+            <a:avLst/>
+            <a:gdLst>
+              <a:gd name="csX0" fmla="*/ 0 w 4856961"/>
+              <a:gd name="csY0" fmla="*/ 4675239 h 4675239"/>
+              <a:gd name="csX1" fmla="*/ 4100052 w 4856961"/>
+              <a:gd name="csY1" fmla="*/ 1932039 h 4675239"/>
+              <a:gd name="csX2" fmla="*/ 4844846 w 4856961"/>
+              <a:gd name="csY2" fmla="*/ 0 h 4675239"/>
+            </a:gdLst>
+            <a:ahLst/>
+            <a:cxnLst>
+              <a:cxn ang="0">
+                <a:pos x="csX0" y="csY0"/>
+              </a:cxn>
+              <a:cxn ang="0">
+                <a:pos x="csX1" y="csY1"/>
+              </a:cxn>
+              <a:cxn ang="0">
+                <a:pos x="csX2" y="csY2"/>
+              </a:cxn>
+            </a:cxnLst>
+            <a:rect l="l" t="t" r="r" b="b"/>
+            <a:pathLst>
+              <a:path w="4856961" h="4675239">
+                <a:moveTo>
+                  <a:pt x="0" y="4675239"/>
+                </a:moveTo>
+                <a:cubicBezTo>
+                  <a:pt x="1646289" y="3693242"/>
+                  <a:pt x="3292578" y="2711245"/>
+                  <a:pt x="4100052" y="1932039"/>
+                </a:cubicBezTo>
+                <a:cubicBezTo>
+                  <a:pt x="4907526" y="1152833"/>
+                  <a:pt x="4876186" y="576416"/>
+                  <a:pt x="4844846" y="0"/>
+                </a:cubicBezTo>
+              </a:path>
+            </a:pathLst>
+          </a:custGeom>
+          <a:noFill/>
+          <a:ln w="76200">
+            <a:solidFill>
+              <a:srgbClr val="FFC000"/>
+            </a:solidFill>
+          </a:ln>
+        </p:spPr>
+        <p:style>
+          <a:lnRef idx="2">
+            <a:schemeClr val="accent1">
+              <a:shade val="15000"/>
+            </a:schemeClr>
+          </a:lnRef>
+          <a:fillRef idx="1">
+            <a:schemeClr val="accent1"/>
+          </a:fillRef>
+          <a:effectRef idx="0">
+            <a:schemeClr val="accent1"/>
+          </a:effectRef>
+          <a:fontRef idx="minor">
+            <a:schemeClr val="lt1"/>
+          </a:fontRef>
+        </p:style>
+        <p:txBody>
+          <a:bodyPr rtlCol="0" anchor="ctr"/>
+          <a:lstStyle/>
+          <a:p>
+            <a:pPr algn="ctr"/>
+            <a:endParaRPr lang="en-PH"/>
+          </a:p>
+        </p:txBody>
+      </p:sp>
+      <p:sp>
+        <p:nvSpPr>
+          <p:cNvPr id="23" name="TextBox 22">
+            <a:extLst>
+              <a:ext uri="{FF2B5EF4-FFF2-40B4-BE49-F238E27FC236}">
+                <a16:creationId xmlns:a16="http://schemas.microsoft.com/office/drawing/2014/main" id="{76CD7FF9-0B60-A3B6-4992-19CC96EC9B68}"/>
+              </a:ext>
+            </a:extLst>
+          </p:cNvPr>
+          <p:cNvSpPr txBox="1"/>
+          <p:nvPr/>
+        </p:nvSpPr>
+        <p:spPr>
+          <a:xfrm>
+            <a:off x="7106498" y="148493"/>
+            <a:ext cx="3005951" cy="707886"/>
+          </a:xfrm>
+          <a:prstGeom prst="rect">
+            <a:avLst/>
+          </a:prstGeom>
+          <a:noFill/>
+        </p:spPr>
+        <p:txBody>
+          <a:bodyPr wrap="none" rtlCol="0">
+            <a:spAutoFit/>
+          </a:bodyPr>
+          <a:lstStyle/>
+          <a:p>
+            <a:r>
+              <a:rPr lang="en-PH" sz="4000" b="1" dirty="0">
+                <a:solidFill>
+                  <a:srgbClr val="FFC000"/>
+                </a:solidFill>
+                <a:latin typeface="Consolas" panose="020B0609020204030204" pitchFamily="49" charset="0"/>
+              </a:rPr>
+              <a:t>O(n log n)</a:t>
+            </a:r>
+          </a:p>
+        </p:txBody>
+      </p:sp>
+      <p:sp>
+        <p:nvSpPr>
+          <p:cNvPr id="24" name="TextBox 23">
+            <a:extLst>
+              <a:ext uri="{FF2B5EF4-FFF2-40B4-BE49-F238E27FC236}">
+                <a16:creationId xmlns:a16="http://schemas.microsoft.com/office/drawing/2014/main" id="{4012E617-4FDE-DBE3-719D-E92AE8D92EE9}"/>
+              </a:ext>
+            </a:extLst>
+          </p:cNvPr>
+          <p:cNvSpPr txBox="1"/>
+          <p:nvPr/>
+        </p:nvSpPr>
+        <p:spPr>
+          <a:xfrm>
+            <a:off x="7177030" y="757567"/>
+            <a:ext cx="3147015" cy="1015663"/>
+          </a:xfrm>
+          <a:prstGeom prst="rect">
+            <a:avLst/>
+          </a:prstGeom>
+          <a:noFill/>
+        </p:spPr>
+        <p:txBody>
+          <a:bodyPr wrap="none" rtlCol="0">
+            <a:spAutoFit/>
+          </a:bodyPr>
+          <a:lstStyle/>
+          <a:p>
+            <a:r>
+              <a:rPr lang="en-PH" sz="1500" b="1" dirty="0">
+                <a:solidFill>
+                  <a:srgbClr val="FFC000"/>
+                </a:solidFill>
+                <a:latin typeface="Consolas" panose="020B0609020204030204" pitchFamily="49" charset="0"/>
+              </a:rPr>
+              <a:t>O(n log n)= quasilinear time</a:t>
+            </a:r>
+          </a:p>
+          <a:p>
+            <a:pPr marL="285750" indent="-285750">
+              <a:buFont typeface="Arial" panose="020B0604020202020204" pitchFamily="34" charset="0"/>
+              <a:buChar char="•"/>
+            </a:pPr>
+            <a:r>
+              <a:rPr lang="en-PH" sz="1500" b="1" dirty="0">
+                <a:solidFill>
+                  <a:srgbClr val="FFC000"/>
+                </a:solidFill>
+                <a:latin typeface="Consolas" panose="020B0609020204030204" pitchFamily="49" charset="0"/>
+              </a:rPr>
+              <a:t>quicksort</a:t>
+            </a:r>
+          </a:p>
+          <a:p>
+            <a:pPr marL="285750" indent="-285750">
+              <a:buFont typeface="Arial" panose="020B0604020202020204" pitchFamily="34" charset="0"/>
+              <a:buChar char="•"/>
+            </a:pPr>
+            <a:r>
+              <a:rPr lang="en-PH" sz="1500" b="1" dirty="0" err="1">
+                <a:solidFill>
+                  <a:srgbClr val="FFC000"/>
+                </a:solidFill>
+                <a:latin typeface="Consolas" panose="020B0609020204030204" pitchFamily="49" charset="0"/>
+              </a:rPr>
+              <a:t>mergesort</a:t>
+            </a:r>
+            <a:endParaRPr lang="en-PH" sz="1500" b="1" dirty="0">
+              <a:solidFill>
+                <a:srgbClr val="FFC000"/>
+              </a:solidFill>
+              <a:latin typeface="Consolas" panose="020B0609020204030204" pitchFamily="49" charset="0"/>
+            </a:endParaRPr>
+          </a:p>
+          <a:p>
+            <a:pPr marL="285750" indent="-285750">
+              <a:buFont typeface="Arial" panose="020B0604020202020204" pitchFamily="34" charset="0"/>
+              <a:buChar char="•"/>
+            </a:pPr>
+            <a:r>
+              <a:rPr lang="en-PH" sz="1500" b="1" dirty="0">
+                <a:solidFill>
+                  <a:srgbClr val="FFC000"/>
+                </a:solidFill>
+                <a:latin typeface="Consolas" panose="020B0609020204030204" pitchFamily="49" charset="0"/>
+              </a:rPr>
+              <a:t>heapsort</a:t>
+            </a:r>
+          </a:p>
+        </p:txBody>
+      </p:sp>
+    </p:spTree>
+    <p:extLst>
+      <p:ext uri="{BB962C8B-B14F-4D97-AF65-F5344CB8AC3E}">
+        <p14:creationId xmlns:p14="http://schemas.microsoft.com/office/powerpoint/2010/main" val="169517357"/>
+      </p:ext>
+    </p:extLst>
+  </p:cSld>
+  <p:clrMapOvr>
+    <a:masterClrMapping/>
+  </p:clrMapOvr>
+  <p:timing>
+    <p:tnLst>
+      <p:par>
+        <p:cTn id="1" dur="indefinite" restart="never" nodeType="tmRoot">
+          <p:childTnLst>
+            <p:seq concurrent="1" nextAc="seek">
+              <p:cTn id="2" dur="indefinite" nodeType="mainSeq">
+                <p:childTnLst>
+                  <p:par>
+                    <p:cTn id="3" fill="hold">
+                      <p:stCondLst>
+                        <p:cond delay="indefinite"/>
+                      </p:stCondLst>
+                      <p:childTnLst>
+                        <p:par>
+                          <p:cTn id="4" fill="hold">
+                            <p:stCondLst>
+                              <p:cond delay="0"/>
+                            </p:stCondLst>
+                            <p:childTnLst>
+                              <p:par>
+                                <p:cTn id="5" presetID="22" presetClass="entr" presetSubtype="4" fill="hold" grpId="0" nodeType="clickEffect">
+                                  <p:stCondLst>
+                                    <p:cond delay="0"/>
+                                  </p:stCondLst>
+                                  <p:childTnLst>
+                                    <p:set>
+                                      <p:cBhvr>
+                                        <p:cTn id="6" dur="1" fill="hold">
+                                          <p:stCondLst>
+                                            <p:cond delay="0"/>
+                                          </p:stCondLst>
+                                        </p:cTn>
+                                        <p:tgtEl>
+                                          <p:spTgt spid="22"/>
+                                        </p:tgtEl>
+                                        <p:attrNameLst>
+                                          <p:attrName>style.visibility</p:attrName>
+                                        </p:attrNameLst>
+                                      </p:cBhvr>
+                                      <p:to>
+                                        <p:strVal val="visible"/>
+                                      </p:to>
+                                    </p:set>
+                                    <p:animEffect transition="in" filter="wipe(down)">
+                                      <p:cBhvr>
+                                        <p:cTn id="7" dur="500"/>
+                                        <p:tgtEl>
+                                          <p:spTgt spid="22"/>
+                                        </p:tgtEl>
+                                      </p:cBhvr>
+                                    </p:animEffect>
+                                  </p:childTnLst>
+                                </p:cTn>
+                              </p:par>
+                            </p:childTnLst>
+                          </p:cTn>
+                        </p:par>
+                      </p:childTnLst>
+                    </p:cTn>
+                  </p:par>
+                  <p:par>
+                    <p:cTn id="8" fill="hold">
+                      <p:stCondLst>
+                        <p:cond delay="indefinite"/>
+                      </p:stCondLst>
+                      <p:childTnLst>
+                        <p:par>
+                          <p:cTn id="9" fill="hold">
+                            <p:stCondLst>
+                              <p:cond delay="0"/>
+                            </p:stCondLst>
+                            <p:childTnLst>
+                              <p:par>
+                                <p:cTn id="10" presetID="10" presetClass="entr" presetSubtype="0" fill="hold" grpId="0" nodeType="clickEffect">
+                                  <p:stCondLst>
+                                    <p:cond delay="0"/>
+                                  </p:stCondLst>
+                                  <p:childTnLst>
+                                    <p:set>
+                                      <p:cBhvr>
+                                        <p:cTn id="11" dur="1" fill="hold">
+                                          <p:stCondLst>
+                                            <p:cond delay="0"/>
+                                          </p:stCondLst>
+                                        </p:cTn>
+                                        <p:tgtEl>
+                                          <p:spTgt spid="23"/>
+                                        </p:tgtEl>
+                                        <p:attrNameLst>
+                                          <p:attrName>style.visibility</p:attrName>
+                                        </p:attrNameLst>
+                                      </p:cBhvr>
+                                      <p:to>
+                                        <p:strVal val="visible"/>
+                                      </p:to>
+                                    </p:set>
+                                    <p:animEffect transition="in" filter="fade">
+                                      <p:cBhvr>
+                                        <p:cTn id="12" dur="500"/>
+                                        <p:tgtEl>
+                                          <p:spTgt spid="23"/>
+                                        </p:tgtEl>
+                                      </p:cBhvr>
+                                    </p:animEffect>
+                                  </p:childTnLst>
+                                </p:cTn>
+                              </p:par>
+                              <p:par>
+                                <p:cTn id="13" presetID="10" presetClass="entr" presetSubtype="0" fill="hold" grpId="0" nodeType="withEffect">
+                                  <p:stCondLst>
+                                    <p:cond delay="0"/>
+                                  </p:stCondLst>
+                                  <p:childTnLst>
+                                    <p:set>
+                                      <p:cBhvr>
+                                        <p:cTn id="14" dur="1" fill="hold">
+                                          <p:stCondLst>
+                                            <p:cond delay="0"/>
+                                          </p:stCondLst>
+                                        </p:cTn>
+                                        <p:tgtEl>
+                                          <p:spTgt spid="24"/>
+                                        </p:tgtEl>
+                                        <p:attrNameLst>
+                                          <p:attrName>style.visibility</p:attrName>
+                                        </p:attrNameLst>
+                                      </p:cBhvr>
+                                      <p:to>
+                                        <p:strVal val="visible"/>
+                                      </p:to>
+                                    </p:set>
+                                    <p:animEffect transition="in" filter="fade">
+                                      <p:cBhvr>
+                                        <p:cTn id="15" dur="500"/>
+                                        <p:tgtEl>
+                                          <p:spTgt spid="24"/>
+                                        </p:tgtEl>
+                                      </p:cBhvr>
+                                    </p:animEffect>
+                                  </p:childTnLst>
+                                </p:cTn>
+                              </p:par>
+                            </p:childTnLst>
+                          </p:cTn>
+                        </p:par>
+                      </p:childTnLst>
+                    </p:cTn>
+                  </p:par>
+                </p:childTnLst>
+              </p:cTn>
+              <p:prevCondLst>
+                <p:cond evt="onPrev" delay="0">
+                  <p:tgtEl>
+                    <p:sldTgt/>
+                  </p:tgtEl>
+                </p:cond>
+              </p:prevCondLst>
+              <p:nextCondLst>
+                <p:cond evt="onNext" delay="0">
+                  <p:tgtEl>
+                    <p:sldTgt/>
+                  </p:tgtEl>
+                </p:cond>
+              </p:nextCondLst>
+            </p:seq>
+          </p:childTnLst>
+        </p:cTn>
+      </p:par>
+    </p:tnLst>
+    <p:bldLst>
+      <p:bldP spid="22" grpId="0" animBg="1"/>
+      <p:bldP spid="23" grpId="0"/>
+      <p:bldP spid="24" grpId="0"/>
     </p:bldLst>
   </p:timing>
 </p:sld>
@@ -10735,6 +11625,21 @@
 </file>
 
 <file path=customXml/item1.xml><?xml version="1.0" encoding="utf-8"?>
+<p:properties xmlns:p="http://schemas.microsoft.com/office/2006/metadata/properties" xmlns:xsi="http://www.w3.org/2001/XMLSchema-instance" xmlns:pc="http://schemas.microsoft.com/office/infopath/2007/PartnerControls">
+  <documentManagement/>
+</p:properties>
+</file>
+
+<file path=customXml/item2.xml><?xml version="1.0" encoding="utf-8"?>
+<?mso-contentType ?>
+<FormTemplates xmlns="http://schemas.microsoft.com/sharepoint/v3/contenttype/forms">
+  <Display>DocumentLibraryForm</Display>
+  <Edit>DocumentLibraryForm</Edit>
+  <New>DocumentLibraryForm</New>
+</FormTemplates>
+</file>
+
+<file path=customXml/item3.xml><?xml version="1.0" encoding="utf-8"?>
 <ct:contentTypeSchema xmlns:ct="http://schemas.microsoft.com/office/2006/metadata/contentType" xmlns:ma="http://schemas.microsoft.com/office/2006/metadata/properties/metaAttributes" ct:_="" ma:_="" ma:contentTypeName="Document" ma:contentTypeID="0x0101007188BDCA587B344BBA6CB1A93FAE6998" ma:contentTypeVersion="2" ma:contentTypeDescription="Create a new document." ma:contentTypeScope="" ma:versionID="7a8e4b6720badb2566a0cfeddfaf2856">
   <xsd:schema xmlns:xsd="http://www.w3.org/2001/XMLSchema" xmlns:xs="http://www.w3.org/2001/XMLSchema" xmlns:p="http://schemas.microsoft.com/office/2006/metadata/properties" xmlns:ns2="ba111d12-426d-4af0-bcb6-460e36974645" targetNamespace="http://schemas.microsoft.com/office/2006/metadata/properties" ma:root="true" ma:fieldsID="989b05398519136c88ba0a8d54e3c3da" ns2:_="">
     <xsd:import namespace="ba111d12-426d-4af0-bcb6-460e36974645"/>
@@ -10866,22 +11771,24 @@
 </ct:contentTypeSchema>
 </file>
 
-<file path=customXml/item2.xml><?xml version="1.0" encoding="utf-8"?>
-<?mso-contentType ?>
-<FormTemplates xmlns="http://schemas.microsoft.com/sharepoint/v3/contenttype/forms">
-  <Display>DocumentLibraryForm</Display>
-  <Edit>DocumentLibraryForm</Edit>
-  <New>DocumentLibraryForm</New>
-</FormTemplates>
+<file path=customXml/itemProps1.xml><?xml version="1.0" encoding="utf-8"?>
+<ds:datastoreItem xmlns:ds="http://schemas.openxmlformats.org/officeDocument/2006/customXml" ds:itemID="{EA3362E2-FA54-4262-AE94-2FA98FF8142D}">
+  <ds:schemaRefs>
+    <ds:schemaRef ds:uri="http://schemas.microsoft.com/office/2006/metadata/properties"/>
+    <ds:schemaRef ds:uri="http://schemas.microsoft.com/office/infopath/2007/PartnerControls"/>
+  </ds:schemaRefs>
+</ds:datastoreItem>
 </file>
 
-<file path=customXml/item3.xml><?xml version="1.0" encoding="utf-8"?>
-<p:properties xmlns:p="http://schemas.microsoft.com/office/2006/metadata/properties" xmlns:xsi="http://www.w3.org/2001/XMLSchema-instance" xmlns:pc="http://schemas.microsoft.com/office/infopath/2007/PartnerControls">
-  <documentManagement/>
-</p:properties>
+<file path=customXml/itemProps2.xml><?xml version="1.0" encoding="utf-8"?>
+<ds:datastoreItem xmlns:ds="http://schemas.openxmlformats.org/officeDocument/2006/customXml" ds:itemID="{651370AF-26B9-4AFA-BA9D-5D4A7E1A6722}">
+  <ds:schemaRefs>
+    <ds:schemaRef ds:uri="http://schemas.microsoft.com/sharepoint/v3/contenttype/forms"/>
+  </ds:schemaRefs>
+</ds:datastoreItem>
 </file>
 
-<file path=customXml/itemProps1.xml><?xml version="1.0" encoding="utf-8"?>
+<file path=customXml/itemProps3.xml><?xml version="1.0" encoding="utf-8"?>
 <ds:datastoreItem xmlns:ds="http://schemas.openxmlformats.org/officeDocument/2006/customXml" ds:itemID="{3D61E20B-708A-4719-8C02-DA91A478A7AB}">
   <ds:schemaRefs>
     <ds:schemaRef ds:uri="http://schemas.microsoft.com/office/2006/metadata/contentType"/>
@@ -10897,21 +11804,4 @@
     <ds:schemaRef ds:uri="http://schemas.microsoft.com/internal/obd"/>
   </ds:schemaRefs>
 </ds:datastoreItem>
-</file>
-
-<file path=customXml/itemProps2.xml><?xml version="1.0" encoding="utf-8"?>
-<ds:datastoreItem xmlns:ds="http://schemas.openxmlformats.org/officeDocument/2006/customXml" ds:itemID="{651370AF-26B9-4AFA-BA9D-5D4A7E1A6722}">
-  <ds:schemaRefs>
-    <ds:schemaRef ds:uri="http://schemas.microsoft.com/sharepoint/v3/contenttype/forms"/>
-  </ds:schemaRefs>
-</ds:datastoreItem>
-</file>
-
-<file path=customXml/itemProps3.xml><?xml version="1.0" encoding="utf-8"?>
-<ds:datastoreItem xmlns:ds="http://schemas.openxmlformats.org/officeDocument/2006/customXml" ds:itemID="{EA3362E2-FA54-4262-AE94-2FA98FF8142D}">
-  <ds:schemaRefs>
-    <ds:schemaRef ds:uri="http://schemas.microsoft.com/office/2006/metadata/properties"/>
-    <ds:schemaRef ds:uri="http://schemas.microsoft.com/office/infopath/2007/PartnerControls"/>
-  </ds:schemaRefs>
-</ds:datastoreItem>
 </file>
--- a/sorting_algorithms/Merge Sort.pptx
+++ b/sorting_algorithms/Merge Sort.pptx
@@ -4315,7 +4315,7 @@
     <p:bg>
       <p:bgPr>
         <a:solidFill>
-          <a:schemeClr val="bg1"/>
+          <a:schemeClr val="tx1"/>
         </a:solidFill>
         <a:effectLst/>
       </p:bgPr>
@@ -4363,18 +4363,18 @@
           <a:lstStyle/>
           <a:p>
             <a:r>
-              <a:rPr lang="en-US" b="1" dirty="0"/>
-              <a:t>What </a:t>
+              <a:rPr lang="en-US" b="1" dirty="0">
+                <a:solidFill>
+                  <a:srgbClr val="00B050"/>
+                </a:solidFill>
+              </a:rPr>
+              <a:t>What is Merge Sort?</a:t>
             </a:r>
-            <a:r>
-              <a:rPr lang="en-US" b="1"/>
-              <a:t>is Merge </a:t>
-            </a:r>
-            <a:r>
-              <a:rPr lang="en-US" b="1" dirty="0"/>
-              <a:t>Sort?</a:t>
-            </a:r>
-            <a:endParaRPr lang="en-PH" b="1" dirty="0"/>
+            <a:endParaRPr lang="en-PH" b="1" dirty="0">
+              <a:solidFill>
+                <a:srgbClr val="00B050"/>
+              </a:solidFill>
+            </a:endParaRPr>
           </a:p>
         </p:txBody>
       </p:sp>
@@ -4499,6 +4499,9 @@
           <a:p>
             <a:pPr algn="l"/>
             <a:endParaRPr lang="en-US" sz="2400" dirty="0">
+              <a:solidFill>
+                <a:schemeClr val="bg1"/>
+              </a:solidFill>
               <a:latin typeface="Calibri (Body)"/>
             </a:endParaRPr>
           </a:p>
@@ -4506,12 +4509,18 @@
             <a:pPr algn="l"/>
             <a:r>
               <a:rPr lang="en-US" sz="2400" dirty="0">
+                <a:solidFill>
+                  <a:schemeClr val="bg1"/>
+                </a:solidFill>
                 <a:latin typeface="Calibri (Body)"/>
               </a:rPr>
               <a:t>Merge Sort </a:t>
             </a:r>
             <a:r>
               <a:rPr lang="en-US" sz="2400" b="0" i="0" dirty="0">
+                <a:solidFill>
+                  <a:schemeClr val="bg1"/>
+                </a:solidFill>
                 <a:effectLst/>
                 <a:latin typeface="Calibri (Body)"/>
               </a:rPr>
@@ -4539,6 +4548,9 @@
             </a:r>
             <a:r>
               <a:rPr lang="en-US" sz="2400" i="0" dirty="0">
+                <a:solidFill>
+                  <a:schemeClr val="bg1"/>
+                </a:solidFill>
                 <a:effectLst/>
                 <a:latin typeface="Calibri (Body)"/>
               </a:rPr>
@@ -4546,6 +4558,9 @@
             </a:r>
             <a:r>
               <a:rPr lang="en-US" sz="2400" b="1" i="0" dirty="0">
+                <a:solidFill>
+                  <a:schemeClr val="bg1"/>
+                </a:solidFill>
                 <a:effectLst/>
                 <a:latin typeface="Calibri (Body)"/>
               </a:rPr>
@@ -4553,6 +4568,9 @@
             </a:r>
             <a:r>
               <a:rPr lang="en-US" sz="2400" b="0" i="0" dirty="0">
+                <a:solidFill>
+                  <a:schemeClr val="bg1"/>
+                </a:solidFill>
                 <a:effectLst/>
                 <a:latin typeface="Calibri (Body)"/>
               </a:rPr>
@@ -4562,6 +4580,9 @@
           <a:p>
             <a:pPr algn="l"/>
             <a:endParaRPr lang="en-US" sz="2400" dirty="0">
+              <a:solidFill>
+                <a:schemeClr val="bg1"/>
+              </a:solidFill>
               <a:latin typeface="Calibri (Body)"/>
             </a:endParaRPr>
           </a:p>
@@ -4569,12 +4590,18 @@
             <a:pPr algn="l"/>
             <a:r>
               <a:rPr lang="en-US" sz="2400" b="0" i="0" dirty="0">
+                <a:solidFill>
+                  <a:schemeClr val="bg1"/>
+                </a:solidFill>
                 <a:effectLst/>
                 <a:latin typeface="Calibri (Body)"/>
               </a:rPr>
               <a:t>Each sub-problem is solved individually. Finally, sub-problems are combined to form the final solution.</a:t>
             </a:r>
             <a:endParaRPr lang="en-US" sz="2400" dirty="0">
+              <a:solidFill>
+                <a:schemeClr val="bg1"/>
+              </a:solidFill>
               <a:latin typeface="Calibri (Body)"/>
             </a:endParaRPr>
           </a:p>
@@ -4635,7 +4662,7 @@
     <p:bg>
       <p:bgPr>
         <a:solidFill>
-          <a:schemeClr val="bg1"/>
+          <a:schemeClr val="tx1"/>
         </a:solidFill>
         <a:effectLst/>
       </p:bgPr>
@@ -4683,10 +4710,18 @@
           <a:lstStyle/>
           <a:p>
             <a:r>
-              <a:rPr lang="en-US" b="1" dirty="0"/>
+              <a:rPr lang="en-US" b="1" dirty="0">
+                <a:solidFill>
+                  <a:srgbClr val="00B050"/>
+                </a:solidFill>
+              </a:rPr>
               <a:t>Merge Sort</a:t>
             </a:r>
-            <a:endParaRPr lang="en-PH" b="1" dirty="0"/>
+            <a:endParaRPr lang="en-PH" b="1" dirty="0">
+              <a:solidFill>
+                <a:srgbClr val="00B050"/>
+              </a:solidFill>
+            </a:endParaRPr>
           </a:p>
         </p:txBody>
       </p:sp>
@@ -5230,7 +5265,7 @@
     <p:bg>
       <p:bgPr>
         <a:solidFill>
-          <a:schemeClr val="bg1"/>
+          <a:schemeClr val="tx1"/>
         </a:solidFill>
         <a:effectLst/>
       </p:bgPr>
@@ -5278,10 +5313,18 @@
           <a:lstStyle/>
           <a:p>
             <a:r>
-              <a:rPr lang="en-US" b="1" dirty="0"/>
+              <a:rPr lang="en-US" b="1" dirty="0">
+                <a:solidFill>
+                  <a:srgbClr val="00B050"/>
+                </a:solidFill>
+              </a:rPr>
               <a:t>Merge Sort</a:t>
             </a:r>
-            <a:endParaRPr lang="en-PH" b="1" dirty="0"/>
+            <a:endParaRPr lang="en-PH" b="1" dirty="0">
+              <a:solidFill>
+                <a:srgbClr val="00B050"/>
+              </a:solidFill>
+            </a:endParaRPr>
           </a:p>
         </p:txBody>
       </p:sp>
@@ -5911,7 +5954,7 @@
     <p:bg>
       <p:bgPr>
         <a:solidFill>
-          <a:schemeClr val="bg1"/>
+          <a:schemeClr val="tx1"/>
         </a:solidFill>
         <a:effectLst/>
       </p:bgPr>
@@ -5959,10 +6002,18 @@
           <a:lstStyle/>
           <a:p>
             <a:r>
-              <a:rPr lang="en-US" b="1" dirty="0"/>
+              <a:rPr lang="en-US" b="1" dirty="0">
+                <a:solidFill>
+                  <a:srgbClr val="00B050"/>
+                </a:solidFill>
+              </a:rPr>
               <a:t>Merge Sort</a:t>
             </a:r>
-            <a:endParaRPr lang="en-PH" b="1" dirty="0"/>
+            <a:endParaRPr lang="en-PH" b="1" dirty="0">
+              <a:solidFill>
+                <a:srgbClr val="00B050"/>
+              </a:solidFill>
+            </a:endParaRPr>
           </a:p>
         </p:txBody>
       </p:sp>
@@ -7257,7 +7308,7 @@
     <p:bg>
       <p:bgPr>
         <a:solidFill>
-          <a:schemeClr val="bg1"/>
+          <a:schemeClr val="tx1"/>
         </a:solidFill>
         <a:effectLst/>
       </p:bgPr>
@@ -7305,10 +7356,18 @@
           <a:lstStyle/>
           <a:p>
             <a:r>
-              <a:rPr lang="en-US" b="1" dirty="0"/>
+              <a:rPr lang="en-US" b="1" dirty="0">
+                <a:solidFill>
+                  <a:srgbClr val="00B050"/>
+                </a:solidFill>
+              </a:rPr>
               <a:t>Merge Sort</a:t>
             </a:r>
-            <a:endParaRPr lang="en-PH" b="1" dirty="0"/>
+            <a:endParaRPr lang="en-PH" b="1" dirty="0">
+              <a:solidFill>
+                <a:srgbClr val="00B050"/>
+              </a:solidFill>
+            </a:endParaRPr>
           </a:p>
         </p:txBody>
       </p:sp>
@@ -8639,7 +8698,7 @@
     <p:bg>
       <p:bgPr>
         <a:solidFill>
-          <a:schemeClr val="bg1"/>
+          <a:schemeClr val="tx1"/>
         </a:solidFill>
         <a:effectLst/>
       </p:bgPr>
@@ -8687,10 +8746,18 @@
           <a:lstStyle/>
           <a:p>
             <a:r>
-              <a:rPr lang="en-US" b="1" dirty="0"/>
+              <a:rPr lang="en-US" b="1" dirty="0">
+                <a:solidFill>
+                  <a:srgbClr val="00B050"/>
+                </a:solidFill>
+              </a:rPr>
               <a:t>Merge Sort</a:t>
             </a:r>
-            <a:endParaRPr lang="en-PH" b="1" dirty="0"/>
+            <a:endParaRPr lang="en-PH" b="1" dirty="0">
+              <a:solidFill>
+                <a:srgbClr val="00B050"/>
+              </a:solidFill>
+            </a:endParaRPr>
           </a:p>
         </p:txBody>
       </p:sp>
@@ -10259,7 +10326,7 @@
     <p:bg>
       <p:bgPr>
         <a:solidFill>
-          <a:schemeClr val="bg1"/>
+          <a:schemeClr val="tx1"/>
         </a:solidFill>
         <a:effectLst/>
       </p:bgPr>
@@ -10404,6 +10471,9 @@
           <a:p>
             <a:r>
               <a:rPr lang="en-PH" sz="4000" b="1" dirty="0">
+                <a:solidFill>
+                  <a:schemeClr val="bg1"/>
+                </a:solidFill>
                 <a:latin typeface="Consolas" panose="020B0609020204030204" pitchFamily="49" charset="0"/>
               </a:rPr>
               <a:t>data</a:t>
@@ -10441,6 +10511,9 @@
           <a:p>
             <a:r>
               <a:rPr lang="en-PH" sz="4000" b="1" dirty="0">
+                <a:solidFill>
+                  <a:schemeClr val="bg1"/>
+                </a:solidFill>
                 <a:latin typeface="Consolas" panose="020B0609020204030204" pitchFamily="49" charset="0"/>
               </a:rPr>
               <a:t>time</a:t>
@@ -11625,21 +11698,6 @@
 </file>
 
 <file path=customXml/item1.xml><?xml version="1.0" encoding="utf-8"?>
-<p:properties xmlns:p="http://schemas.microsoft.com/office/2006/metadata/properties" xmlns:xsi="http://www.w3.org/2001/XMLSchema-instance" xmlns:pc="http://schemas.microsoft.com/office/infopath/2007/PartnerControls">
-  <documentManagement/>
-</p:properties>
-</file>
-
-<file path=customXml/item2.xml><?xml version="1.0" encoding="utf-8"?>
-<?mso-contentType ?>
-<FormTemplates xmlns="http://schemas.microsoft.com/sharepoint/v3/contenttype/forms">
-  <Display>DocumentLibraryForm</Display>
-  <Edit>DocumentLibraryForm</Edit>
-  <New>DocumentLibraryForm</New>
-</FormTemplates>
-</file>
-
-<file path=customXml/item3.xml><?xml version="1.0" encoding="utf-8"?>
 <ct:contentTypeSchema xmlns:ct="http://schemas.microsoft.com/office/2006/metadata/contentType" xmlns:ma="http://schemas.microsoft.com/office/2006/metadata/properties/metaAttributes" ct:_="" ma:_="" ma:contentTypeName="Document" ma:contentTypeID="0x0101007188BDCA587B344BBA6CB1A93FAE6998" ma:contentTypeVersion="2" ma:contentTypeDescription="Create a new document." ma:contentTypeScope="" ma:versionID="7a8e4b6720badb2566a0cfeddfaf2856">
   <xsd:schema xmlns:xsd="http://www.w3.org/2001/XMLSchema" xmlns:xs="http://www.w3.org/2001/XMLSchema" xmlns:p="http://schemas.microsoft.com/office/2006/metadata/properties" xmlns:ns2="ba111d12-426d-4af0-bcb6-460e36974645" targetNamespace="http://schemas.microsoft.com/office/2006/metadata/properties" ma:root="true" ma:fieldsID="989b05398519136c88ba0a8d54e3c3da" ns2:_="">
     <xsd:import namespace="ba111d12-426d-4af0-bcb6-460e36974645"/>
@@ -11771,24 +11829,22 @@
 </ct:contentTypeSchema>
 </file>
 
-<file path=customXml/itemProps1.xml><?xml version="1.0" encoding="utf-8"?>
-<ds:datastoreItem xmlns:ds="http://schemas.openxmlformats.org/officeDocument/2006/customXml" ds:itemID="{EA3362E2-FA54-4262-AE94-2FA98FF8142D}">
-  <ds:schemaRefs>
-    <ds:schemaRef ds:uri="http://schemas.microsoft.com/office/2006/metadata/properties"/>
-    <ds:schemaRef ds:uri="http://schemas.microsoft.com/office/infopath/2007/PartnerControls"/>
-  </ds:schemaRefs>
-</ds:datastoreItem>
+<file path=customXml/item2.xml><?xml version="1.0" encoding="utf-8"?>
+<?mso-contentType ?>
+<FormTemplates xmlns="http://schemas.microsoft.com/sharepoint/v3/contenttype/forms">
+  <Display>DocumentLibraryForm</Display>
+  <Edit>DocumentLibraryForm</Edit>
+  <New>DocumentLibraryForm</New>
+</FormTemplates>
 </file>
 
-<file path=customXml/itemProps2.xml><?xml version="1.0" encoding="utf-8"?>
-<ds:datastoreItem xmlns:ds="http://schemas.openxmlformats.org/officeDocument/2006/customXml" ds:itemID="{651370AF-26B9-4AFA-BA9D-5D4A7E1A6722}">
-  <ds:schemaRefs>
-    <ds:schemaRef ds:uri="http://schemas.microsoft.com/sharepoint/v3/contenttype/forms"/>
-  </ds:schemaRefs>
-</ds:datastoreItem>
+<file path=customXml/item3.xml><?xml version="1.0" encoding="utf-8"?>
+<p:properties xmlns:p="http://schemas.microsoft.com/office/2006/metadata/properties" xmlns:xsi="http://www.w3.org/2001/XMLSchema-instance" xmlns:pc="http://schemas.microsoft.com/office/infopath/2007/PartnerControls">
+  <documentManagement/>
+</p:properties>
 </file>
 
-<file path=customXml/itemProps3.xml><?xml version="1.0" encoding="utf-8"?>
+<file path=customXml/itemProps1.xml><?xml version="1.0" encoding="utf-8"?>
 <ds:datastoreItem xmlns:ds="http://schemas.openxmlformats.org/officeDocument/2006/customXml" ds:itemID="{3D61E20B-708A-4719-8C02-DA91A478A7AB}">
   <ds:schemaRefs>
     <ds:schemaRef ds:uri="http://schemas.microsoft.com/office/2006/metadata/contentType"/>
@@ -11804,4 +11860,21 @@
     <ds:schemaRef ds:uri="http://schemas.microsoft.com/internal/obd"/>
   </ds:schemaRefs>
 </ds:datastoreItem>
+</file>
+
+<file path=customXml/itemProps2.xml><?xml version="1.0" encoding="utf-8"?>
+<ds:datastoreItem xmlns:ds="http://schemas.openxmlformats.org/officeDocument/2006/customXml" ds:itemID="{651370AF-26B9-4AFA-BA9D-5D4A7E1A6722}">
+  <ds:schemaRefs>
+    <ds:schemaRef ds:uri="http://schemas.microsoft.com/sharepoint/v3/contenttype/forms"/>
+  </ds:schemaRefs>
+</ds:datastoreItem>
+</file>
+
+<file path=customXml/itemProps3.xml><?xml version="1.0" encoding="utf-8"?>
+<ds:datastoreItem xmlns:ds="http://schemas.openxmlformats.org/officeDocument/2006/customXml" ds:itemID="{EA3362E2-FA54-4262-AE94-2FA98FF8142D}">
+  <ds:schemaRefs>
+    <ds:schemaRef ds:uri="http://schemas.microsoft.com/office/2006/metadata/properties"/>
+    <ds:schemaRef ds:uri="http://schemas.microsoft.com/office/infopath/2007/PartnerControls"/>
+  </ds:schemaRefs>
+</ds:datastoreItem>
 </file>